--- a/slides/slide-10.pptx
+++ b/slides/slide-10.pptx
@@ -4373,8 +4373,8 @@
         </p:nvSpPr>
         <p:spPr>
           <a:xfrm xmlns:a="http://schemas.openxmlformats.org/drawingml/2006/main">
-            <a:off x="609480" y="533520"/>
-            <a:ext cx="11000880" cy="657000"/>
+            <a:off x="609600" y="609600"/>
+            <a:ext cx="10972800" cy="685800"/>
           </a:xfrm>
           <a:prstGeom xmlns:a="http://schemas.openxmlformats.org/drawingml/2006/main" prst="rect">
             <a:avLst/>
@@ -4395,80 +4395,80 @@
             <a:noAutofit/>
           </a:bodyPr>
           <a:lstStyle xmlns:a="http://schemas.openxmlformats.org/drawingml/2006/main">
-            <a:defPPr>
-              <a:defRPr>
+            <a:defPPr algn="l">
+              <a:defRPr sz="3300">
                 <a:latin typeface="HarmonyOS Sans SC"/>
                 <a:ea typeface="HarmonyOS Sans SC"/>
                 <a:cs typeface="HarmonyOS Sans SC"/>
               </a:defRPr>
             </a:defPPr>
-            <a:lvl1pPr>
-              <a:buNone/>
-              <a:defRPr>
+            <a:lvl1pPr algn="l">
+              <a:buNone/>
+              <a:defRPr sz="3300">
                 <a:latin typeface="HarmonyOS Sans SC"/>
                 <a:ea typeface="HarmonyOS Sans SC"/>
                 <a:cs typeface="HarmonyOS Sans SC"/>
               </a:defRPr>
             </a:lvl1pPr>
-            <a:lvl2pPr>
-              <a:buNone/>
-              <a:defRPr>
+            <a:lvl2pPr algn="l">
+              <a:buNone/>
+              <a:defRPr sz="3300">
                 <a:latin typeface="HarmonyOS Sans SC"/>
                 <a:ea typeface="HarmonyOS Sans SC"/>
                 <a:cs typeface="HarmonyOS Sans SC"/>
               </a:defRPr>
             </a:lvl2pPr>
-            <a:lvl3pPr>
-              <a:buNone/>
-              <a:defRPr>
+            <a:lvl3pPr algn="l">
+              <a:buNone/>
+              <a:defRPr sz="3300">
                 <a:latin typeface="HarmonyOS Sans SC"/>
                 <a:ea typeface="HarmonyOS Sans SC"/>
                 <a:cs typeface="HarmonyOS Sans SC"/>
               </a:defRPr>
             </a:lvl3pPr>
-            <a:lvl4pPr>
-              <a:buNone/>
-              <a:defRPr>
+            <a:lvl4pPr algn="l">
+              <a:buNone/>
+              <a:defRPr sz="3300">
                 <a:latin typeface="HarmonyOS Sans SC"/>
                 <a:ea typeface="HarmonyOS Sans SC"/>
                 <a:cs typeface="HarmonyOS Sans SC"/>
               </a:defRPr>
             </a:lvl4pPr>
-            <a:lvl5pPr>
-              <a:buNone/>
-              <a:defRPr>
+            <a:lvl5pPr algn="l">
+              <a:buNone/>
+              <a:defRPr sz="3300">
                 <a:latin typeface="HarmonyOS Sans SC"/>
                 <a:ea typeface="HarmonyOS Sans SC"/>
                 <a:cs typeface="HarmonyOS Sans SC"/>
               </a:defRPr>
             </a:lvl5pPr>
-            <a:lvl6pPr>
-              <a:buNone/>
-              <a:defRPr>
+            <a:lvl6pPr algn="l">
+              <a:buNone/>
+              <a:defRPr sz="3300">
                 <a:latin typeface="HarmonyOS Sans SC"/>
                 <a:ea typeface="HarmonyOS Sans SC"/>
                 <a:cs typeface="HarmonyOS Sans SC"/>
               </a:defRPr>
             </a:lvl6pPr>
-            <a:lvl7pPr>
-              <a:buNone/>
-              <a:defRPr>
+            <a:lvl7pPr algn="l">
+              <a:buNone/>
+              <a:defRPr sz="3300">
                 <a:latin typeface="HarmonyOS Sans SC"/>
                 <a:ea typeface="HarmonyOS Sans SC"/>
                 <a:cs typeface="HarmonyOS Sans SC"/>
               </a:defRPr>
             </a:lvl7pPr>
-            <a:lvl8pPr>
-              <a:buNone/>
-              <a:defRPr>
+            <a:lvl8pPr algn="l">
+              <a:buNone/>
+              <a:defRPr sz="3300">
                 <a:latin typeface="HarmonyOS Sans SC"/>
                 <a:ea typeface="HarmonyOS Sans SC"/>
                 <a:cs typeface="HarmonyOS Sans SC"/>
               </a:defRPr>
             </a:lvl8pPr>
-            <a:lvl9pPr>
-              <a:buNone/>
-              <a:defRPr>
+            <a:lvl9pPr algn="l">
+              <a:buNone/>
+              <a:defRPr sz="3300">
                 <a:latin typeface="HarmonyOS Sans SC"/>
                 <a:ea typeface="HarmonyOS Sans SC"/>
                 <a:cs typeface="HarmonyOS Sans SC"/>
@@ -4476,19 +4476,19 @@
             </a:lvl9pPr>
           </a:lstStyle>
           <a:p xmlns:a="http://schemas.openxmlformats.org/drawingml/2006/main">
-            <a:pPr>
+            <a:pPr algn="l">
               <a:lnSpc>
                 <a:spcPct val="116000"/>
               </a:lnSpc>
               <a:buNone/>
-              <a:defRPr>
-                <a:latin typeface="HarmonyOS Sans SC"/>
-                <a:ea typeface="HarmonyOS Sans SC"/>
-                <a:cs typeface="HarmonyOS Sans SC"/>
-              </a:defRPr>
-            </a:pPr>
-            <a:r>
-              <a:rPr sz="3450" b="1" u="none" strike="noStrike">
+              <a:defRPr sz="3300">
+                <a:latin typeface="HarmonyOS Sans SC"/>
+                <a:ea typeface="HarmonyOS Sans SC"/>
+                <a:cs typeface="HarmonyOS Sans SC"/>
+              </a:defRPr>
+            </a:pPr>
+            <a:r>
+              <a:rPr sz="3300" b="1" u="none" strike="noStrike">
                 <a:solidFill>
                   <a:srgbClr val="F7F7F2"/>
                 </a:solidFill>
@@ -4525,8 +4525,8 @@
         </p:nvSpPr>
         <p:spPr>
           <a:xfrm xmlns:a="http://schemas.openxmlformats.org/drawingml/2006/main">
-            <a:off x="628560" y="1809720"/>
-            <a:ext cx="6048000" cy="1152000"/>
+            <a:off x="609600" y="1752600"/>
+            <a:ext cx="5372100" cy="1219200"/>
           </a:xfrm>
           <a:prstGeom xmlns:a="http://schemas.openxmlformats.org/drawingml/2006/main" prst="rect">
             <a:avLst/>
@@ -4547,80 +4547,80 @@
             <a:noAutofit/>
           </a:bodyPr>
           <a:lstStyle xmlns:a="http://schemas.openxmlformats.org/drawingml/2006/main">
-            <a:defPPr>
-              <a:defRPr>
+            <a:defPPr algn="l">
+              <a:defRPr sz="3000">
                 <a:latin typeface="HarmonyOS Sans SC"/>
                 <a:ea typeface="HarmonyOS Sans SC"/>
                 <a:cs typeface="HarmonyOS Sans SC"/>
               </a:defRPr>
             </a:defPPr>
-            <a:lvl1pPr>
-              <a:buNone/>
-              <a:defRPr>
+            <a:lvl1pPr algn="l">
+              <a:buNone/>
+              <a:defRPr sz="3000">
                 <a:latin typeface="HarmonyOS Sans SC"/>
                 <a:ea typeface="HarmonyOS Sans SC"/>
                 <a:cs typeface="HarmonyOS Sans SC"/>
               </a:defRPr>
             </a:lvl1pPr>
-            <a:lvl2pPr>
-              <a:buNone/>
-              <a:defRPr>
+            <a:lvl2pPr algn="l">
+              <a:buNone/>
+              <a:defRPr sz="3000">
                 <a:latin typeface="HarmonyOS Sans SC"/>
                 <a:ea typeface="HarmonyOS Sans SC"/>
                 <a:cs typeface="HarmonyOS Sans SC"/>
               </a:defRPr>
             </a:lvl2pPr>
-            <a:lvl3pPr>
-              <a:buNone/>
-              <a:defRPr>
+            <a:lvl3pPr algn="l">
+              <a:buNone/>
+              <a:defRPr sz="3000">
                 <a:latin typeface="HarmonyOS Sans SC"/>
                 <a:ea typeface="HarmonyOS Sans SC"/>
                 <a:cs typeface="HarmonyOS Sans SC"/>
               </a:defRPr>
             </a:lvl3pPr>
-            <a:lvl4pPr>
-              <a:buNone/>
-              <a:defRPr>
+            <a:lvl4pPr algn="l">
+              <a:buNone/>
+              <a:defRPr sz="3000">
                 <a:latin typeface="HarmonyOS Sans SC"/>
                 <a:ea typeface="HarmonyOS Sans SC"/>
                 <a:cs typeface="HarmonyOS Sans SC"/>
               </a:defRPr>
             </a:lvl4pPr>
-            <a:lvl5pPr>
-              <a:buNone/>
-              <a:defRPr>
+            <a:lvl5pPr algn="l">
+              <a:buNone/>
+              <a:defRPr sz="3000">
                 <a:latin typeface="HarmonyOS Sans SC"/>
                 <a:ea typeface="HarmonyOS Sans SC"/>
                 <a:cs typeface="HarmonyOS Sans SC"/>
               </a:defRPr>
             </a:lvl5pPr>
-            <a:lvl6pPr>
-              <a:buNone/>
-              <a:defRPr>
+            <a:lvl6pPr algn="l">
+              <a:buNone/>
+              <a:defRPr sz="3000">
                 <a:latin typeface="HarmonyOS Sans SC"/>
                 <a:ea typeface="HarmonyOS Sans SC"/>
                 <a:cs typeface="HarmonyOS Sans SC"/>
               </a:defRPr>
             </a:lvl6pPr>
-            <a:lvl7pPr>
-              <a:buNone/>
-              <a:defRPr>
+            <a:lvl7pPr algn="l">
+              <a:buNone/>
+              <a:defRPr sz="3000">
                 <a:latin typeface="HarmonyOS Sans SC"/>
                 <a:ea typeface="HarmonyOS Sans SC"/>
                 <a:cs typeface="HarmonyOS Sans SC"/>
               </a:defRPr>
             </a:lvl7pPr>
-            <a:lvl8pPr>
-              <a:buNone/>
-              <a:defRPr>
+            <a:lvl8pPr algn="l">
+              <a:buNone/>
+              <a:defRPr sz="3000">
                 <a:latin typeface="HarmonyOS Sans SC"/>
                 <a:ea typeface="HarmonyOS Sans SC"/>
                 <a:cs typeface="HarmonyOS Sans SC"/>
               </a:defRPr>
             </a:lvl8pPr>
-            <a:lvl9pPr>
-              <a:buNone/>
-              <a:defRPr>
+            <a:lvl9pPr algn="l">
+              <a:buNone/>
+              <a:defRPr sz="3000">
                 <a:latin typeface="HarmonyOS Sans SC"/>
                 <a:ea typeface="HarmonyOS Sans SC"/>
                 <a:cs typeface="HarmonyOS Sans SC"/>
@@ -4628,19 +4628,19 @@
             </a:lvl9pPr>
           </a:lstStyle>
           <a:p xmlns:a="http://schemas.openxmlformats.org/drawingml/2006/main">
-            <a:pPr>
+            <a:pPr algn="l">
               <a:lnSpc>
                 <a:spcPct val="116000"/>
               </a:lnSpc>
               <a:buNone/>
-              <a:defRPr>
-                <a:latin typeface="HarmonyOS Sans SC"/>
-                <a:ea typeface="HarmonyOS Sans SC"/>
-                <a:cs typeface="HarmonyOS Sans SC"/>
-              </a:defRPr>
-            </a:pPr>
-            <a:r>
-              <a:rPr sz="3150" b="1" u="none" strike="noStrike">
+              <a:defRPr sz="3000">
+                <a:latin typeface="HarmonyOS Sans SC"/>
+                <a:ea typeface="HarmonyOS Sans SC"/>
+                <a:cs typeface="HarmonyOS Sans SC"/>
+              </a:defRPr>
+            </a:pPr>
+            <a:r>
+              <a:rPr sz="3000" b="1" u="none" strike="noStrike">
                 <a:solidFill>
                   <a:srgbClr val="65E8D4"/>
                 </a:solidFill>
@@ -4660,19 +4660,19 @@
             </a:endParaRPr>
           </a:p>
           <a:p xmlns:a="http://schemas.openxmlformats.org/drawingml/2006/main">
-            <a:pPr>
+            <a:pPr algn="l">
               <a:lnSpc>
                 <a:spcPct val="116000"/>
               </a:lnSpc>
               <a:buNone/>
-              <a:defRPr>
-                <a:latin typeface="HarmonyOS Sans SC"/>
-                <a:ea typeface="HarmonyOS Sans SC"/>
-                <a:cs typeface="HarmonyOS Sans SC"/>
-              </a:defRPr>
-            </a:pPr>
-            <a:r>
-              <a:rPr sz="3150" b="1" u="none" strike="noStrike">
+              <a:defRPr sz="3000">
+                <a:latin typeface="HarmonyOS Sans SC"/>
+                <a:ea typeface="HarmonyOS Sans SC"/>
+                <a:cs typeface="HarmonyOS Sans SC"/>
+              </a:defRPr>
+            </a:pPr>
+            <a:r>
+              <a:rPr sz="3000" b="1" u="none" strike="noStrike">
                 <a:solidFill>
                   <a:srgbClr val="65E8D4"/>
                 </a:solidFill>
@@ -4709,8 +4709,8 @@
         </p:nvSpPr>
         <p:spPr>
           <a:xfrm xmlns:a="http://schemas.openxmlformats.org/drawingml/2006/main">
-            <a:off x="638280" y="3343320"/>
-            <a:ext cx="6352920" cy="456840"/>
+            <a:off x="609600" y="3200400"/>
+            <a:ext cx="5372100" cy="762000"/>
           </a:xfrm>
           <a:prstGeom xmlns:a="http://schemas.openxmlformats.org/drawingml/2006/main" prst="rect">
             <a:avLst/>
@@ -4731,80 +4731,80 @@
             <a:noAutofit/>
           </a:bodyPr>
           <a:lstStyle xmlns:a="http://schemas.openxmlformats.org/drawingml/2006/main">
-            <a:defPPr>
-              <a:defRPr>
+            <a:defPPr algn="l">
+              <a:defRPr sz="1950">
                 <a:latin typeface="HarmonyOS Sans SC"/>
                 <a:ea typeface="HarmonyOS Sans SC"/>
                 <a:cs typeface="HarmonyOS Sans SC"/>
               </a:defRPr>
             </a:defPPr>
-            <a:lvl1pPr>
-              <a:buNone/>
-              <a:defRPr>
+            <a:lvl1pPr algn="l">
+              <a:buNone/>
+              <a:defRPr sz="1950">
                 <a:latin typeface="HarmonyOS Sans SC"/>
                 <a:ea typeface="HarmonyOS Sans SC"/>
                 <a:cs typeface="HarmonyOS Sans SC"/>
               </a:defRPr>
             </a:lvl1pPr>
-            <a:lvl2pPr>
-              <a:buNone/>
-              <a:defRPr>
+            <a:lvl2pPr algn="l">
+              <a:buNone/>
+              <a:defRPr sz="1950">
                 <a:latin typeface="HarmonyOS Sans SC"/>
                 <a:ea typeface="HarmonyOS Sans SC"/>
                 <a:cs typeface="HarmonyOS Sans SC"/>
               </a:defRPr>
             </a:lvl2pPr>
-            <a:lvl3pPr>
-              <a:buNone/>
-              <a:defRPr>
+            <a:lvl3pPr algn="l">
+              <a:buNone/>
+              <a:defRPr sz="1950">
                 <a:latin typeface="HarmonyOS Sans SC"/>
                 <a:ea typeface="HarmonyOS Sans SC"/>
                 <a:cs typeface="HarmonyOS Sans SC"/>
               </a:defRPr>
             </a:lvl3pPr>
-            <a:lvl4pPr>
-              <a:buNone/>
-              <a:defRPr>
+            <a:lvl4pPr algn="l">
+              <a:buNone/>
+              <a:defRPr sz="1950">
                 <a:latin typeface="HarmonyOS Sans SC"/>
                 <a:ea typeface="HarmonyOS Sans SC"/>
                 <a:cs typeface="HarmonyOS Sans SC"/>
               </a:defRPr>
             </a:lvl4pPr>
-            <a:lvl5pPr>
-              <a:buNone/>
-              <a:defRPr>
+            <a:lvl5pPr algn="l">
+              <a:buNone/>
+              <a:defRPr sz="1950">
                 <a:latin typeface="HarmonyOS Sans SC"/>
                 <a:ea typeface="HarmonyOS Sans SC"/>
                 <a:cs typeface="HarmonyOS Sans SC"/>
               </a:defRPr>
             </a:lvl5pPr>
-            <a:lvl6pPr>
-              <a:buNone/>
-              <a:defRPr>
+            <a:lvl6pPr algn="l">
+              <a:buNone/>
+              <a:defRPr sz="1950">
                 <a:latin typeface="HarmonyOS Sans SC"/>
                 <a:ea typeface="HarmonyOS Sans SC"/>
                 <a:cs typeface="HarmonyOS Sans SC"/>
               </a:defRPr>
             </a:lvl6pPr>
-            <a:lvl7pPr>
-              <a:buNone/>
-              <a:defRPr>
+            <a:lvl7pPr algn="l">
+              <a:buNone/>
+              <a:defRPr sz="1950">
                 <a:latin typeface="HarmonyOS Sans SC"/>
                 <a:ea typeface="HarmonyOS Sans SC"/>
                 <a:cs typeface="HarmonyOS Sans SC"/>
               </a:defRPr>
             </a:lvl7pPr>
-            <a:lvl8pPr>
-              <a:buNone/>
-              <a:defRPr>
+            <a:lvl8pPr algn="l">
+              <a:buNone/>
+              <a:defRPr sz="1950">
                 <a:latin typeface="HarmonyOS Sans SC"/>
                 <a:ea typeface="HarmonyOS Sans SC"/>
                 <a:cs typeface="HarmonyOS Sans SC"/>
               </a:defRPr>
             </a:lvl8pPr>
-            <a:lvl9pPr>
-              <a:buNone/>
-              <a:defRPr>
+            <a:lvl9pPr algn="l">
+              <a:buNone/>
+              <a:defRPr sz="1950">
                 <a:latin typeface="HarmonyOS Sans SC"/>
                 <a:ea typeface="HarmonyOS Sans SC"/>
                 <a:cs typeface="HarmonyOS Sans SC"/>
@@ -4812,19 +4812,19 @@
             </a:lvl9pPr>
           </a:lstStyle>
           <a:p xmlns:a="http://schemas.openxmlformats.org/drawingml/2006/main">
-            <a:pPr>
+            <a:pPr algn="l">
               <a:lnSpc>
                 <a:spcPct val="116000"/>
               </a:lnSpc>
               <a:buNone/>
-              <a:defRPr>
-                <a:latin typeface="HarmonyOS Sans SC"/>
-                <a:ea typeface="HarmonyOS Sans SC"/>
-                <a:cs typeface="HarmonyOS Sans SC"/>
-              </a:defRPr>
-            </a:pPr>
-            <a:r>
-              <a:rPr sz="2100" b="0" u="none" strike="noStrike">
+              <a:defRPr sz="1950">
+                <a:latin typeface="HarmonyOS Sans SC"/>
+                <a:ea typeface="HarmonyOS Sans SC"/>
+                <a:cs typeface="HarmonyOS Sans SC"/>
+              </a:defRPr>
+            </a:pPr>
+            <a:r>
+              <a:rPr sz="1950" b="0" u="none" strike="noStrike">
                 <a:solidFill>
                   <a:srgbClr val="F7F7F2"/>
                 </a:solidFill>
@@ -4832,7 +4832,39 @@
                 <a:ea typeface="HarmonyOS Sans SC"/>
                 <a:cs typeface="HarmonyOS Sans SC"/>
               </a:rPr>
-              <a:t>让作品更容易分享、复用与继续开发</a:t>
+              <a:t>让作品更容易分享、复用</a:t>
+            </a:r>
+            <a:endParaRPr sz="2100" b="0" u="none" strike="noStrike">
+              <a:solidFill>
+                <a:srgbClr val="FFFFFF"/>
+              </a:solidFill>
+              <a:latin typeface="Arial"/>
+              <a:ea typeface="Arial"/>
+              <a:cs typeface="Arial"/>
+            </a:endParaRPr>
+          </a:p>
+          <a:p xmlns:a="http://schemas.openxmlformats.org/drawingml/2006/main">
+            <a:pPr algn="l">
+              <a:lnSpc>
+                <a:spcPct val="116000"/>
+              </a:lnSpc>
+              <a:buNone/>
+              <a:defRPr sz="1950">
+                <a:latin typeface="HarmonyOS Sans SC"/>
+                <a:ea typeface="HarmonyOS Sans SC"/>
+                <a:cs typeface="HarmonyOS Sans SC"/>
+              </a:defRPr>
+            </a:pPr>
+            <a:r>
+              <a:rPr sz="1950" b="0" u="none" strike="noStrike">
+                <a:solidFill>
+                  <a:srgbClr val="F7F7F2"/>
+                </a:solidFill>
+                <a:latin typeface="HarmonyOS Sans SC"/>
+                <a:ea typeface="HarmonyOS Sans SC"/>
+                <a:cs typeface="HarmonyOS Sans SC"/>
+              </a:rPr>
+              <a:t>与继续开发</a:t>
             </a:r>
             <a:endParaRPr sz="2100" b="0" u="none" strike="noStrike">
               <a:solidFill>
@@ -4861,8 +4893,8 @@
         </p:nvSpPr>
         <p:spPr>
           <a:xfrm xmlns:a="http://schemas.openxmlformats.org/drawingml/2006/main">
-            <a:off x="638280" y="4486320"/>
-            <a:ext cx="6333840" cy="1009440"/>
+            <a:off x="609600" y="4419600"/>
+            <a:ext cx="5372100" cy="990600"/>
           </a:xfrm>
           <a:prstGeom xmlns:a="http://schemas.openxmlformats.org/drawingml/2006/main" prst="rect">
             <a:avLst/>
@@ -4883,80 +4915,80 @@
             <a:noAutofit/>
           </a:bodyPr>
           <a:lstStyle xmlns:a="http://schemas.openxmlformats.org/drawingml/2006/main">
-            <a:defPPr>
-              <a:defRPr>
+            <a:defPPr algn="l">
+              <a:defRPr sz="2250">
                 <a:latin typeface="HarmonyOS Sans SC"/>
                 <a:ea typeface="HarmonyOS Sans SC"/>
                 <a:cs typeface="HarmonyOS Sans SC"/>
               </a:defRPr>
             </a:defPPr>
-            <a:lvl1pPr>
-              <a:buNone/>
-              <a:defRPr>
+            <a:lvl1pPr algn="l">
+              <a:buNone/>
+              <a:defRPr sz="2250">
                 <a:latin typeface="HarmonyOS Sans SC"/>
                 <a:ea typeface="HarmonyOS Sans SC"/>
                 <a:cs typeface="HarmonyOS Sans SC"/>
               </a:defRPr>
             </a:lvl1pPr>
-            <a:lvl2pPr>
-              <a:buNone/>
-              <a:defRPr>
+            <a:lvl2pPr algn="l">
+              <a:buNone/>
+              <a:defRPr sz="2250">
                 <a:latin typeface="HarmonyOS Sans SC"/>
                 <a:ea typeface="HarmonyOS Sans SC"/>
                 <a:cs typeface="HarmonyOS Sans SC"/>
               </a:defRPr>
             </a:lvl2pPr>
-            <a:lvl3pPr>
-              <a:buNone/>
-              <a:defRPr>
+            <a:lvl3pPr algn="l">
+              <a:buNone/>
+              <a:defRPr sz="2250">
                 <a:latin typeface="HarmonyOS Sans SC"/>
                 <a:ea typeface="HarmonyOS Sans SC"/>
                 <a:cs typeface="HarmonyOS Sans SC"/>
               </a:defRPr>
             </a:lvl3pPr>
-            <a:lvl4pPr>
-              <a:buNone/>
-              <a:defRPr>
+            <a:lvl4pPr algn="l">
+              <a:buNone/>
+              <a:defRPr sz="2250">
                 <a:latin typeface="HarmonyOS Sans SC"/>
                 <a:ea typeface="HarmonyOS Sans SC"/>
                 <a:cs typeface="HarmonyOS Sans SC"/>
               </a:defRPr>
             </a:lvl4pPr>
-            <a:lvl5pPr>
-              <a:buNone/>
-              <a:defRPr>
+            <a:lvl5pPr algn="l">
+              <a:buNone/>
+              <a:defRPr sz="2250">
                 <a:latin typeface="HarmonyOS Sans SC"/>
                 <a:ea typeface="HarmonyOS Sans SC"/>
                 <a:cs typeface="HarmonyOS Sans SC"/>
               </a:defRPr>
             </a:lvl5pPr>
-            <a:lvl6pPr>
-              <a:buNone/>
-              <a:defRPr>
+            <a:lvl6pPr algn="l">
+              <a:buNone/>
+              <a:defRPr sz="2250">
                 <a:latin typeface="HarmonyOS Sans SC"/>
                 <a:ea typeface="HarmonyOS Sans SC"/>
                 <a:cs typeface="HarmonyOS Sans SC"/>
               </a:defRPr>
             </a:lvl6pPr>
-            <a:lvl7pPr>
-              <a:buNone/>
-              <a:defRPr>
+            <a:lvl7pPr algn="l">
+              <a:buNone/>
+              <a:defRPr sz="2250">
                 <a:latin typeface="HarmonyOS Sans SC"/>
                 <a:ea typeface="HarmonyOS Sans SC"/>
                 <a:cs typeface="HarmonyOS Sans SC"/>
               </a:defRPr>
             </a:lvl7pPr>
-            <a:lvl8pPr>
-              <a:buNone/>
-              <a:defRPr>
+            <a:lvl8pPr algn="l">
+              <a:buNone/>
+              <a:defRPr sz="2250">
                 <a:latin typeface="HarmonyOS Sans SC"/>
                 <a:ea typeface="HarmonyOS Sans SC"/>
                 <a:cs typeface="HarmonyOS Sans SC"/>
               </a:defRPr>
             </a:lvl8pPr>
-            <a:lvl9pPr>
-              <a:buNone/>
-              <a:defRPr>
+            <a:lvl9pPr algn="l">
+              <a:buNone/>
+              <a:defRPr sz="2250">
                 <a:latin typeface="HarmonyOS Sans SC"/>
                 <a:ea typeface="HarmonyOS Sans SC"/>
                 <a:cs typeface="HarmonyOS Sans SC"/>
@@ -4964,19 +4996,19 @@
             </a:lvl9pPr>
           </a:lstStyle>
           <a:p xmlns:a="http://schemas.openxmlformats.org/drawingml/2006/main">
-            <a:pPr>
+            <a:pPr algn="l">
               <a:lnSpc>
                 <a:spcPct val="116000"/>
               </a:lnSpc>
               <a:buNone/>
-              <a:defRPr>
-                <a:latin typeface="HarmonyOS Sans SC"/>
-                <a:ea typeface="HarmonyOS Sans SC"/>
-                <a:cs typeface="HarmonyOS Sans SC"/>
-              </a:defRPr>
-            </a:pPr>
-            <a:r>
-              <a:rPr sz="2550" b="1" u="none" strike="noStrike">
+              <a:defRPr sz="2250">
+                <a:latin typeface="HarmonyOS Sans SC"/>
+                <a:ea typeface="HarmonyOS Sans SC"/>
+                <a:cs typeface="HarmonyOS Sans SC"/>
+              </a:defRPr>
+            </a:pPr>
+            <a:r>
+              <a:rPr sz="2250" b="1" u="none" strike="noStrike">
                 <a:solidFill>
                   <a:srgbClr val="F7F7F2"/>
                 </a:solidFill>
@@ -4987,7 +5019,7 @@
               <a:t>AI </a:t>
             </a:r>
             <a:r>
-              <a:rPr sz="2550" b="1" u="none" strike="noStrike">
+              <a:rPr sz="2250" b="1" u="none" strike="noStrike">
                 <a:solidFill>
                   <a:srgbClr val="F7F7F2"/>
                 </a:solidFill>
@@ -5007,19 +5039,19 @@
             </a:endParaRPr>
           </a:p>
           <a:p xmlns:a="http://schemas.openxmlformats.org/drawingml/2006/main">
-            <a:pPr>
+            <a:pPr algn="l">
               <a:lnSpc>
                 <a:spcPct val="116000"/>
               </a:lnSpc>
               <a:buNone/>
-              <a:defRPr>
-                <a:latin typeface="HarmonyOS Sans SC"/>
-                <a:ea typeface="HarmonyOS Sans SC"/>
-                <a:cs typeface="HarmonyOS Sans SC"/>
-              </a:defRPr>
-            </a:pPr>
-            <a:r>
-              <a:rPr sz="2550" b="1" u="none" strike="noStrike">
+              <a:defRPr sz="2250">
+                <a:latin typeface="HarmonyOS Sans SC"/>
+                <a:ea typeface="HarmonyOS Sans SC"/>
+                <a:cs typeface="HarmonyOS Sans SC"/>
+              </a:defRPr>
+            </a:pPr>
+            <a:r>
+              <a:rPr sz="2250" b="1" u="none" strike="noStrike">
                 <a:solidFill>
                   <a:srgbClr val="F7F7F2"/>
                 </a:solidFill>
@@ -5056,8 +5088,8 @@
         </p:nvSpPr>
         <p:spPr>
           <a:xfrm xmlns:a="http://schemas.openxmlformats.org/drawingml/2006/main">
-            <a:off x="638175" y="5772150"/>
-            <a:ext cx="6534150" cy="523875"/>
+            <a:off x="609600" y="5638800"/>
+            <a:ext cx="5372100" cy="609600"/>
           </a:xfrm>
           <a:prstGeom xmlns:a="http://schemas.openxmlformats.org/drawingml/2006/main" prst="rect">
             <a:avLst/>
@@ -5078,78 +5110,78 @@
             <a:noAutofit/>
           </a:bodyPr>
           <a:lstStyle xmlns:a="http://schemas.openxmlformats.org/drawingml/2006/main">
-            <a:defPPr>
+            <a:defPPr algn="l">
+              <a:defRPr sz="1650">
+                <a:latin typeface="HarmonyOS Sans SC"/>
+                <a:ea typeface="HarmonyOS Sans SC"/>
+                <a:cs typeface="HarmonyOS Sans SC"/>
+              </a:defRPr>
+            </a:defPPr>
+            <a:lvl1pPr algn="l">
+              <a:buNone/>
               <a:defRPr sz="1800">
                 <a:latin typeface="HarmonyOS Sans SC"/>
                 <a:ea typeface="HarmonyOS Sans SC"/>
                 <a:cs typeface="HarmonyOS Sans SC"/>
               </a:defRPr>
-            </a:defPPr>
-            <a:lvl1pPr>
+            </a:lvl1pPr>
+            <a:lvl2pPr algn="l">
               <a:buNone/>
               <a:defRPr sz="1800">
                 <a:latin typeface="HarmonyOS Sans SC"/>
                 <a:ea typeface="HarmonyOS Sans SC"/>
                 <a:cs typeface="HarmonyOS Sans SC"/>
               </a:defRPr>
-            </a:lvl1pPr>
-            <a:lvl2pPr>
+            </a:lvl2pPr>
+            <a:lvl3pPr algn="l">
               <a:buNone/>
               <a:defRPr sz="1800">
                 <a:latin typeface="HarmonyOS Sans SC"/>
                 <a:ea typeface="HarmonyOS Sans SC"/>
                 <a:cs typeface="HarmonyOS Sans SC"/>
               </a:defRPr>
-            </a:lvl2pPr>
-            <a:lvl3pPr>
+            </a:lvl3pPr>
+            <a:lvl4pPr algn="l">
               <a:buNone/>
               <a:defRPr sz="1800">
                 <a:latin typeface="HarmonyOS Sans SC"/>
                 <a:ea typeface="HarmonyOS Sans SC"/>
                 <a:cs typeface="HarmonyOS Sans SC"/>
               </a:defRPr>
-            </a:lvl3pPr>
-            <a:lvl4pPr>
+            </a:lvl4pPr>
+            <a:lvl5pPr algn="l">
               <a:buNone/>
               <a:defRPr sz="1800">
                 <a:latin typeface="HarmonyOS Sans SC"/>
                 <a:ea typeface="HarmonyOS Sans SC"/>
                 <a:cs typeface="HarmonyOS Sans SC"/>
               </a:defRPr>
-            </a:lvl4pPr>
-            <a:lvl5pPr>
+            </a:lvl5pPr>
+            <a:lvl6pPr algn="l">
               <a:buNone/>
               <a:defRPr sz="1800">
                 <a:latin typeface="HarmonyOS Sans SC"/>
                 <a:ea typeface="HarmonyOS Sans SC"/>
                 <a:cs typeface="HarmonyOS Sans SC"/>
               </a:defRPr>
-            </a:lvl5pPr>
-            <a:lvl6pPr>
+            </a:lvl6pPr>
+            <a:lvl7pPr algn="l">
               <a:buNone/>
               <a:defRPr sz="1800">
                 <a:latin typeface="HarmonyOS Sans SC"/>
                 <a:ea typeface="HarmonyOS Sans SC"/>
                 <a:cs typeface="HarmonyOS Sans SC"/>
               </a:defRPr>
-            </a:lvl6pPr>
-            <a:lvl7pPr>
+            </a:lvl7pPr>
+            <a:lvl8pPr algn="l">
               <a:buNone/>
               <a:defRPr sz="1800">
                 <a:latin typeface="HarmonyOS Sans SC"/>
                 <a:ea typeface="HarmonyOS Sans SC"/>
                 <a:cs typeface="HarmonyOS Sans SC"/>
               </a:defRPr>
-            </a:lvl7pPr>
-            <a:lvl8pPr>
-              <a:buNone/>
-              <a:defRPr sz="1800">
-                <a:latin typeface="HarmonyOS Sans SC"/>
-                <a:ea typeface="HarmonyOS Sans SC"/>
-                <a:cs typeface="HarmonyOS Sans SC"/>
-              </a:defRPr>
             </a:lvl8pPr>
-            <a:lvl9pPr>
+            <a:lvl9pPr algn="l">
               <a:buNone/>
               <a:defRPr sz="1800">
                 <a:latin typeface="HarmonyOS Sans SC"/>
@@ -5159,19 +5191,19 @@
             </a:lvl9pPr>
           </a:lstStyle>
           <a:p xmlns:a="http://schemas.openxmlformats.org/drawingml/2006/main">
-            <a:pPr>
+            <a:pPr algn="l">
               <a:lnSpc>
                 <a:spcPct val="116000"/>
               </a:lnSpc>
               <a:buNone/>
-              <a:defRPr sz="1800">
-                <a:latin typeface="HarmonyOS Sans SC"/>
-                <a:ea typeface="HarmonyOS Sans SC"/>
-                <a:cs typeface="HarmonyOS Sans SC"/>
-              </a:defRPr>
-            </a:pPr>
-            <a:r>
-              <a:rPr sz="1800" b="0" u="none" strike="noStrike">
+              <a:defRPr sz="1650">
+                <a:latin typeface="HarmonyOS Sans SC"/>
+                <a:ea typeface="HarmonyOS Sans SC"/>
+                <a:cs typeface="HarmonyOS Sans SC"/>
+              </a:defRPr>
+            </a:pPr>
+            <a:r>
+              <a:rPr sz="1650" b="0" u="none" strike="noStrike">
                 <a:solidFill>
                   <a:srgbClr val="A6A7B2"/>
                 </a:solidFill>
@@ -5212,8 +5244,8 @@
         </p:blipFill>
         <p:spPr>
           <a:xfrm xmlns:a="http://schemas.openxmlformats.org/drawingml/2006/main">
-            <a:off x="7591320" y="1771560"/>
-            <a:ext cx="4000320" cy="4000320"/>
+            <a:off x="7143750" y="1752600"/>
+            <a:ext cx="4438650" cy="4438650"/>
           </a:xfrm>
           <a:prstGeom xmlns:a="http://schemas.openxmlformats.org/drawingml/2006/main" prst="rect">
             <a:avLst/>
@@ -5249,7 +5281,7 @@
         </p:blipFill>
         <p:spPr>
           <a:xfrm xmlns:a="http://schemas.openxmlformats.org/drawingml/2006/main">
-            <a:off x="609600" y="6524625"/>
+            <a:off x="609600" y="6400800"/>
             <a:ext cx="1952625" cy="228220"/>
           </a:xfrm>
           <a:prstGeom xmlns:a="http://schemas.openxmlformats.org/drawingml/2006/main" prst="rect">
@@ -5273,8 +5305,8 @@
         </p:nvSpPr>
         <p:spPr>
           <a:xfrm xmlns:a="http://schemas.openxmlformats.org/drawingml/2006/main">
-            <a:off x="11191875" y="6505575"/>
-            <a:ext cx="419100" cy="247650"/>
+            <a:off x="11163300" y="6400800"/>
+            <a:ext cx="419100" cy="228600"/>
           </a:xfrm>
           <a:prstGeom xmlns:a="http://schemas.openxmlformats.org/drawingml/2006/main" prst="rect">
             <a:avLst/>
@@ -5285,7 +5317,7 @@
           </a:ln>
         </p:spPr>
         <p:txBody>
-          <a:bodyPr xmlns:a="http://schemas.openxmlformats.org/drawingml/2006/main" wrap="none" lIns="0" tIns="0" rIns="0" bIns="0" anchor="ctr">
+          <a:bodyPr xmlns:a="http://schemas.openxmlformats.org/drawingml/2006/main" wrap="none" lIns="0" tIns="0" rIns="0" bIns="0" anchor="t">
             <a:noAutofit/>
           </a:bodyPr>
           <a:lstStyle xmlns:a="http://schemas.openxmlformats.org/drawingml/2006/main">
